--- a/GiT.pptx
+++ b/GiT.pptx
@@ -126,7 +126,7 @@
 <file path=ppt/revisionInfo.xml><?xml version="1.0" encoding="utf-8"?>
 <p1510:revInfo xmlns:a="http://schemas.openxmlformats.org/drawingml/2006/main" xmlns:r="http://schemas.openxmlformats.org/officeDocument/2006/relationships" xmlns:p1510="http://schemas.microsoft.com/office/powerpoint/2015/10/main">
   <p1510:revLst>
-    <p1510:client id="{9A79D8E7-FF9A-435B-91FA-E27FC5CD7EBD}" v="2" dt="2026-02-15T14:31:22.124"/>
+    <p1510:client id="{9A732CF5-B1A3-4689-A305-B92DE604EB06}" v="2" dt="2026-06-21T15:10:23.511"/>
   </p1510:revLst>
 </p1510:revInfo>
 </file>
@@ -134,20 +134,20 @@
 <file path=ppt/changesInfos/changesInfo1.xml><?xml version="1.0" encoding="utf-8"?>
 <pc:chgInfo xmlns:a="http://schemas.openxmlformats.org/drawingml/2006/main" xmlns:r="http://schemas.openxmlformats.org/officeDocument/2006/relationships" xmlns:ac="http://schemas.microsoft.com/office/drawing/2013/main/command" xmlns:pc="http://schemas.microsoft.com/office/powerpoint/2013/main/command">
   <pc:docChgLst>
-    <pc:chgData name="Md. Sarowar Alam" userId="9539afdc-ec1f-45f6-8cbd-7124b29a6808" providerId="ADAL" clId="{2589B6CF-D0E0-4975-B636-E8806377144A}"/>
-    <pc:docChg chg="undo custSel addSld delSld modSld sldOrd">
-      <pc:chgData name="Md. Sarowar Alam" userId="9539afdc-ec1f-45f6-8cbd-7124b29a6808" providerId="ADAL" clId="{2589B6CF-D0E0-4975-B636-E8806377144A}" dt="2026-02-15T14:31:22.124" v="184" actId="20577"/>
+    <pc:chgData name="MD Sarowar Alam" userId="9539afdc-ec1f-45f6-8cbd-7124b29a6808" providerId="ADAL" clId="{2EE43518-8741-4AAD-A86A-DEF55C869D9A}"/>
+    <pc:docChg chg="modSld">
+      <pc:chgData name="MD Sarowar Alam" userId="9539afdc-ec1f-45f6-8cbd-7124b29a6808" providerId="ADAL" clId="{2EE43518-8741-4AAD-A86A-DEF55C869D9A}" dt="2026-06-21T15:10:23.511" v="1" actId="20577"/>
       <pc:docMkLst>
         <pc:docMk/>
       </pc:docMkLst>
-      <pc:sldChg chg="addSp delSp modSp mod setBg addAnim delAnim">
-        <pc:chgData name="Md. Sarowar Alam" userId="9539afdc-ec1f-45f6-8cbd-7124b29a6808" providerId="ADAL" clId="{2589B6CF-D0E0-4975-B636-E8806377144A}" dt="2026-02-15T14:31:22.124" v="184" actId="20577"/>
+      <pc:sldChg chg="modSp">
+        <pc:chgData name="MD Sarowar Alam" userId="9539afdc-ec1f-45f6-8cbd-7124b29a6808" providerId="ADAL" clId="{2EE43518-8741-4AAD-A86A-DEF55C869D9A}" dt="2026-06-21T15:10:23.511" v="1" actId="20577"/>
         <pc:sldMkLst>
           <pc:docMk/>
           <pc:sldMk cId="705646989" sldId="256"/>
         </pc:sldMkLst>
         <pc:spChg chg="mod">
-          <ac:chgData name="Md. Sarowar Alam" userId="9539afdc-ec1f-45f6-8cbd-7124b29a6808" providerId="ADAL" clId="{2589B6CF-D0E0-4975-B636-E8806377144A}" dt="2026-02-15T14:31:22.124" v="184" actId="20577"/>
+          <ac:chgData name="MD Sarowar Alam" userId="9539afdc-ec1f-45f6-8cbd-7124b29a6808" providerId="ADAL" clId="{2EE43518-8741-4AAD-A86A-DEF55C869D9A}" dt="2026-06-21T15:10:23.511" v="1" actId="20577"/>
           <ac:spMkLst>
             <pc:docMk/>
             <pc:sldMk cId="705646989" sldId="256"/>
@@ -242,7 +242,7 @@
           <a:p>
             <a:fld id="{D9CE7E47-7720-4A35-9F67-DEABC12B5892}" type="datetimeFigureOut">
               <a:rPr lang="en-GB" smtClean="0"/>
-              <a:t>15/02/2026</a:t>
+              <a:t>21/06/2026</a:t>
             </a:fld>
             <a:endParaRPr lang="en-GB"/>
           </a:p>
@@ -975,7 +975,7 @@
             <a:fld id="{B61BEF0D-F0BB-DE4B-95CE-6DB70DBA9567}" type="datetimeFigureOut">
               <a:rPr lang="en-US" dirty="0"/>
               <a:pPr/>
-              <a:t>2/15/2026</a:t>
+              <a:t>6/21/2026</a:t>
             </a:fld>
             <a:endParaRPr lang="en-US" dirty="0"/>
           </a:p>
@@ -1317,7 +1317,7 @@
             <a:fld id="{B61BEF0D-F0BB-DE4B-95CE-6DB70DBA9567}" type="datetimeFigureOut">
               <a:rPr lang="en-US" dirty="0"/>
               <a:pPr/>
-              <a:t>2/15/2026</a:t>
+              <a:t>6/21/2026</a:t>
             </a:fld>
             <a:endParaRPr lang="en-US" dirty="0"/>
           </a:p>
@@ -1715,7 +1715,7 @@
             <a:fld id="{B61BEF0D-F0BB-DE4B-95CE-6DB70DBA9567}" type="datetimeFigureOut">
               <a:rPr lang="en-US" dirty="0"/>
               <a:pPr/>
-              <a:t>2/15/2026</a:t>
+              <a:t>6/21/2026</a:t>
             </a:fld>
             <a:endParaRPr lang="en-US" dirty="0"/>
           </a:p>
@@ -2048,7 +2048,7 @@
             <a:fld id="{B61BEF0D-F0BB-DE4B-95CE-6DB70DBA9567}" type="datetimeFigureOut">
               <a:rPr lang="en-US" dirty="0"/>
               <a:pPr/>
-              <a:t>2/15/2026</a:t>
+              <a:t>6/21/2026</a:t>
             </a:fld>
             <a:endParaRPr lang="en-US" dirty="0"/>
           </a:p>
@@ -2365,7 +2365,7 @@
             <a:fld id="{B61BEF0D-F0BB-DE4B-95CE-6DB70DBA9567}" type="datetimeFigureOut">
               <a:rPr lang="en-US" dirty="0"/>
               <a:pPr/>
-              <a:t>2/15/2026</a:t>
+              <a:t>6/21/2026</a:t>
             </a:fld>
             <a:endParaRPr lang="en-US" dirty="0"/>
           </a:p>
@@ -2758,7 +2758,7 @@
             <a:fld id="{B61BEF0D-F0BB-DE4B-95CE-6DB70DBA9567}" type="datetimeFigureOut">
               <a:rPr lang="en-US" dirty="0"/>
               <a:pPr/>
-              <a:t>2/15/2026</a:t>
+              <a:t>6/21/2026</a:t>
             </a:fld>
             <a:endParaRPr lang="en-US" dirty="0"/>
           </a:p>
@@ -3012,7 +3012,7 @@
             <a:fld id="{B61BEF0D-F0BB-DE4B-95CE-6DB70DBA9567}" type="datetimeFigureOut">
               <a:rPr lang="en-US" dirty="0"/>
               <a:pPr/>
-              <a:t>2/15/2026</a:t>
+              <a:t>6/21/2026</a:t>
             </a:fld>
             <a:endParaRPr lang="en-US" dirty="0"/>
           </a:p>
@@ -3271,7 +3271,7 @@
             <a:fld id="{B61BEF0D-F0BB-DE4B-95CE-6DB70DBA9567}" type="datetimeFigureOut">
               <a:rPr lang="en-US" dirty="0"/>
               <a:pPr/>
-              <a:t>2/15/2026</a:t>
+              <a:t>6/21/2026</a:t>
             </a:fld>
             <a:endParaRPr lang="en-US" dirty="0"/>
           </a:p>
@@ -3530,7 +3530,7 @@
             <a:fld id="{B61BEF0D-F0BB-DE4B-95CE-6DB70DBA9567}" type="datetimeFigureOut">
               <a:rPr lang="en-US" dirty="0"/>
               <a:pPr/>
-              <a:t>2/15/2026</a:t>
+              <a:t>6/21/2026</a:t>
             </a:fld>
             <a:endParaRPr lang="en-US" dirty="0"/>
           </a:p>
@@ -3856,7 +3856,7 @@
             <a:fld id="{B61BEF0D-F0BB-DE4B-95CE-6DB70DBA9567}" type="datetimeFigureOut">
               <a:rPr lang="en-US" dirty="0"/>
               <a:pPr/>
-              <a:t>2/15/2026</a:t>
+              <a:t>6/21/2026</a:t>
             </a:fld>
             <a:endParaRPr lang="en-US" dirty="0"/>
           </a:p>
@@ -4176,7 +4176,7 @@
             <a:fld id="{B61BEF0D-F0BB-DE4B-95CE-6DB70DBA9567}" type="datetimeFigureOut">
               <a:rPr lang="en-US" dirty="0"/>
               <a:pPr/>
-              <a:t>2/15/2026</a:t>
+              <a:t>6/21/2026</a:t>
             </a:fld>
             <a:endParaRPr lang="en-US" dirty="0"/>
           </a:p>
@@ -4630,7 +4630,7 @@
             <a:fld id="{B61BEF0D-F0BB-DE4B-95CE-6DB70DBA9567}" type="datetimeFigureOut">
               <a:rPr lang="en-US" dirty="0"/>
               <a:pPr/>
-              <a:t>2/15/2026</a:t>
+              <a:t>6/21/2026</a:t>
             </a:fld>
             <a:endParaRPr lang="en-US" dirty="0"/>
           </a:p>
@@ -4832,7 +4832,7 @@
             <a:fld id="{B61BEF0D-F0BB-DE4B-95CE-6DB70DBA9567}" type="datetimeFigureOut">
               <a:rPr lang="en-US" dirty="0"/>
               <a:pPr/>
-              <a:t>2/15/2026</a:t>
+              <a:t>6/21/2026</a:t>
             </a:fld>
             <a:endParaRPr lang="en-US" dirty="0"/>
           </a:p>
@@ -5006,7 +5006,7 @@
             <a:fld id="{B61BEF0D-F0BB-DE4B-95CE-6DB70DBA9567}" type="datetimeFigureOut">
               <a:rPr lang="en-US" dirty="0"/>
               <a:pPr/>
-              <a:t>2/15/2026</a:t>
+              <a:t>6/21/2026</a:t>
             </a:fld>
             <a:endParaRPr lang="en-US" dirty="0"/>
           </a:p>
@@ -5336,7 +5336,7 @@
             <a:fld id="{B61BEF0D-F0BB-DE4B-95CE-6DB70DBA9567}" type="datetimeFigureOut">
               <a:rPr lang="en-US" dirty="0"/>
               <a:pPr/>
-              <a:t>2/15/2026</a:t>
+              <a:t>6/21/2026</a:t>
             </a:fld>
             <a:endParaRPr lang="en-US" dirty="0"/>
           </a:p>
@@ -5678,7 +5678,7 @@
             <a:fld id="{B61BEF0D-F0BB-DE4B-95CE-6DB70DBA9567}" type="datetimeFigureOut">
               <a:rPr lang="en-US" dirty="0"/>
               <a:pPr/>
-              <a:t>2/15/2026</a:t>
+              <a:t>6/21/2026</a:t>
             </a:fld>
             <a:endParaRPr lang="en-US" dirty="0"/>
           </a:p>
@@ -7967,7 +7967,7 @@
             <a:fld id="{B61BEF0D-F0BB-DE4B-95CE-6DB70DBA9567}" type="datetimeFigureOut">
               <a:rPr lang="en-US" dirty="0"/>
               <a:pPr/>
-              <a:t>2/15/2026</a:t>
+              <a:t>6/21/2026</a:t>
             </a:fld>
             <a:endParaRPr lang="en-US" dirty="0"/>
           </a:p>
@@ -8632,13 +8632,8 @@
           <a:p>
             <a:r>
               <a:rPr lang="en-US" dirty="0"/>
-              <a:t>DevOps Batch </a:t>
+              <a:t>DevOps Batch – 13</a:t>
             </a:r>
-            <a:r>
-              <a:rPr lang="en-US"/>
-              <a:t>– 10</a:t>
-            </a:r>
-            <a:endParaRPr lang="en-US" dirty="0"/>
           </a:p>
           <a:p>
             <a:r>
